--- a/neerlandais1/powerpoints/Module_24_Nou_toch_maar.pptx
+++ b/neerlandais1/powerpoints/Module_24_Nou_toch_maar.pptx
@@ -133,18 +133,18 @@
   <p:extLst>
     <p:ext uri="{521415D9-36F7-43E2-AB2F-B90AF26B5E84}">
       <p14:sectionLst xmlns:p14="http://schemas.microsoft.com/office/powerpoint/2010/main">
-        <p14:section name="Ouverture" id="{a4f4ff12-4b15-6a5b-bf7c-af3e6318567f}">
+        <p14:section name="Ouverture" id="{8f64fc60-c258-0772-0292-37d61ea9a233}">
           <p14:sldIdLst>
             <p14:sldId id="256"/>
           </p14:sldIdLst>
         </p14:section>
-        <p14:section name="Découvrir" id="{318d2fda-1c69-90b0-dffa-98424ffd00b0}">
+        <p14:section name="Découvrir" id="{7ee3f093-fda7-de27-19f5-3a471e8609d4}">
           <p14:sldIdLst>
             <p14:sldId id="257"/>
             <p14:sldId id="258"/>
           </p14:sldIdLst>
         </p14:section>
-        <p14:section name="Comprendre" id="{2cc0c235-77c1-e6ee-4dc7-5732bf353489}">
+        <p14:section name="Comprendre" id="{98d67862-8106-cb71-7ec9-a73917096d08}">
           <p14:sldIdLst>
             <p14:sldId id="259"/>
             <p14:sldId id="260"/>
@@ -158,7 +158,7 @@
             <p14:sldId id="268"/>
           </p14:sldIdLst>
         </p14:section>
-        <p14:section name="JIJ NU ! — Oefeningen" id="{db7d261c-714d-eb87-1fde-e7390c8026a6}">
+        <p14:section name="JIJ NU ! — Oefeningen" id="{d791db39-3b24-2f63-41c4-31d694429396}">
           <p14:sldIdLst>
             <p14:sldId id="269"/>
             <p14:sldId id="270"/>
@@ -175,7 +175,7 @@
             <p14:sldId id="281"/>
           </p14:sldIdLst>
         </p14:section>
-        <p14:section name="Clôture" id="{74e558df-a03d-cfdc-806b-9452211de40e}">
+        <p14:section name="Clôture" id="{a8360076-33b8-4ba4-7c49-586db4033a8c}">
           <p14:sldIdLst>
             <p14:sldId id="282"/>
           </p14:sldIdLst>
@@ -2192,7 +2192,7 @@
             <a:r>
               <a:rPr lang="en-US" dirty="0"/>
               <a:t>Objectif : Mise en situation : demander un service à un collègue, de façon naturelle.
-Chaque demande doit contenir au moins une particule, chaque réponse aussi. verzetten = déplacer (un rendez-vous). een lift = un trajet en voiture (Kan ik met je meerijden?). C'est la tâche finale orale du parcours.</a:t>
+Chaque demande doit contenir au moins une particule, chaque réponse aussi. verzetten = déplacer (un rendez-vous). een lift = un trajet en voiture (Kan ik met je meerijden?). C'est la tâche finale orale du bloc 5.</a:t>
             </a:r>
             <a:endParaRPr lang="en-US" dirty="0"/>
           </a:p>
@@ -2280,12 +2280,12 @@
           <a:p>
             <a:r>
               <a:rPr lang="en-US" dirty="0"/>
-              <a:t>Objectif : Vérifier les 3 objectifs et clore le parcours Néerlandais 1.
+              <a:t>Objectif : Vérifier les 3 objectifs et clore le bloc 5.
 Réponses :
 1. Wacht even! · Heb je soms een pen?
 2. Je komt toch morgen?
 3. Kun je me even helpen?
-Bilan : faites relire la frise des 24 modules et choisir un module à retravailler. En Néerlandais 2 : om … te, les autres conjonctions, hoeven te, le conditionnel (zou), le passif.</a:t>
+Bilan : faites relire la frise des 24 modules et choisir un module à retravailler. Bloc 6 : l'heure (M25), les montants (M26), graag / houden van (M27), zich / elkaar (M28) et le conditionnel (M29, bilan final du parcours).</a:t>
             </a:r>
             <a:endParaRPr lang="en-US" dirty="0"/>
           </a:p>
@@ -3806,7 +3806,7 @@
                   <a:srgbClr val="FFFFFF"/>
                 </a:solidFill>
               </a:rPr>
-              <a:t>MODULE 24 / 24</a:t>
+              <a:t>MODULE 24 / 29</a:t>
             </a:r>
             <a:endParaRPr lang="en-US" sz="1400" dirty="0"/>
           </a:p>
@@ -31918,7 +31918,7 @@
                   <a:schemeClr val="tx2"/>
                 </a:solidFill>
               </a:rPr>
-              <a:t>Ticket de sortie et bilan du parcours</a:t>
+              <a:t>Ticket de sortie et bilan du bloc 5</a:t>
             </a:r>
             <a:endParaRPr lang="en-US" sz="3000" dirty="0"/>
           </a:p>
@@ -32930,7 +32930,7 @@
                   <a:schemeClr val="bg1"/>
                 </a:solidFill>
               </a:rPr>
-              <a:t>Proficiat! Néerlandais 1 is klaar.</a:t>
+              <a:t>Proficiat! Bloc 5 is klaar.</a:t>
             </a:r>
             <a:r>
               <a:rPr lang="en-US" sz="1800" dirty="0">
@@ -32938,7 +32938,15 @@
                   <a:schemeClr val="bg1"/>
                 </a:solidFill>
               </a:rPr>
-              <a:t> — Volgende stap : Néerlandais 2</a:t>
+              <a:t> — Volgende stap : bloc 6, M25 </a:t>
+            </a:r>
+            <a:r>
+              <a:rPr lang="en-US" sz="1800" i="1" dirty="0">
+                <a:solidFill>
+                  <a:schemeClr val="bg1"/>
+                </a:solidFill>
+              </a:rPr>
+              <a:t>Hoe laat is het?</a:t>
             </a:r>
             <a:endParaRPr lang="en-US" sz="1800" dirty="0"/>
           </a:p>
@@ -32974,7 +32982,7 @@
                   <a:schemeClr val="accent5"/>
                 </a:solidFill>
               </a:rPr>
-              <a:t>NÉERLANDAIS 1 · 24 MODULES</a:t>
+              <a:t>BLOCS 1 À 5 · 24 MODULES</a:t>
             </a:r>
             <a:endParaRPr lang="en-US" sz="1200" dirty="0"/>
           </a:p>

--- a/neerlandais1/powerpoints/Module_24_Nou_toch_maar.pptx
+++ b/neerlandais1/powerpoints/Module_24_Nou_toch_maar.pptx
@@ -133,18 +133,18 @@
   <p:extLst>
     <p:ext uri="{521415D9-36F7-43E2-AB2F-B90AF26B5E84}">
       <p14:sectionLst xmlns:p14="http://schemas.microsoft.com/office/powerpoint/2010/main">
-        <p14:section name="Ouverture" id="{8f64fc60-c258-0772-0292-37d61ea9a233}">
+        <p14:section name="Ouverture" id="{4eace189-6e9b-a816-10e6-7a7acc0761ad}">
           <p14:sldIdLst>
             <p14:sldId id="256"/>
           </p14:sldIdLst>
         </p14:section>
-        <p14:section name="Découvrir" id="{7ee3f093-fda7-de27-19f5-3a471e8609d4}">
+        <p14:section name="Découvrir" id="{170a502d-75f3-1bfd-82bf-5ddac6ff1fad}">
           <p14:sldIdLst>
             <p14:sldId id="257"/>
             <p14:sldId id="258"/>
           </p14:sldIdLst>
         </p14:section>
-        <p14:section name="Comprendre" id="{98d67862-8106-cb71-7ec9-a73917096d08}">
+        <p14:section name="Comprendre" id="{ad25e7ff-5f4b-8791-758f-ad71e5f9babc}">
           <p14:sldIdLst>
             <p14:sldId id="259"/>
             <p14:sldId id="260"/>
@@ -158,7 +158,7 @@
             <p14:sldId id="268"/>
           </p14:sldIdLst>
         </p14:section>
-        <p14:section name="JIJ NU ! — Oefeningen" id="{d791db39-3b24-2f63-41c4-31d694429396}">
+        <p14:section name="JIJ NU ! — Oefeningen" id="{2e4afaf4-863a-6c7d-773c-d42e920ea447}">
           <p14:sldIdLst>
             <p14:sldId id="269"/>
             <p14:sldId id="270"/>
@@ -175,7 +175,7 @@
             <p14:sldId id="281"/>
           </p14:sldIdLst>
         </p14:section>
-        <p14:section name="Clôture" id="{a8360076-33b8-4ba4-7c49-586db4033a8c}">
+        <p14:section name="Clôture" id="{ba128805-27c7-5052-aebe-a1a1c16305ad}">
           <p14:sldIdLst>
             <p14:sldId id="282"/>
           </p14:sldIdLst>
@@ -2285,7 +2285,7 @@
 1. Wacht even! · Heb je soms een pen?
 2. Je komt toch morgen?
 3. Kun je me even helpen?
-Bilan : faites relire la frise des 24 modules et choisir un module à retravailler. Bloc 6 : l'heure (M25), les montants (M26), graag / houden van (M27), zich / elkaar (M28) et le conditionnel (M29, bilan final du parcours).</a:t>
+Bilan : faites relire la frise des 24 modules et choisir un module à retravailler. Bloc 6 : l'heure (M25), les montants (M26), graag / houden van (M27), zich / elkaar (M28) et le conditionnel (M29). Bloc 7 : l'entreprise (M30), les achterzetsels (M31) et la présentation professionnelle (M32, bilan final du parcours).</a:t>
             </a:r>
             <a:endParaRPr lang="en-US" dirty="0"/>
           </a:p>
@@ -3806,7 +3806,7 @@
                   <a:srgbClr val="FFFFFF"/>
                 </a:solidFill>
               </a:rPr>
-              <a:t>MODULE 24 / 29</a:t>
+              <a:t>MODULE 24 / 32</a:t>
             </a:r>
             <a:endParaRPr lang="en-US" sz="1400" dirty="0"/>
           </a:p>

--- a/neerlandais1/powerpoints/Module_24_Nou_toch_maar.pptx
+++ b/neerlandais1/powerpoints/Module_24_Nou_toch_maar.pptx
@@ -133,18 +133,18 @@
   <p:extLst>
     <p:ext uri="{521415D9-36F7-43E2-AB2F-B90AF26B5E84}">
       <p14:sectionLst xmlns:p14="http://schemas.microsoft.com/office/powerpoint/2010/main">
-        <p14:section name="Ouverture" id="{4eace189-6e9b-a816-10e6-7a7acc0761ad}">
+        <p14:section name="Ouverture" id="{5e167113-339a-e583-4cd1-63123f7e36d7}">
           <p14:sldIdLst>
             <p14:sldId id="256"/>
           </p14:sldIdLst>
         </p14:section>
-        <p14:section name="Découvrir" id="{170a502d-75f3-1bfd-82bf-5ddac6ff1fad}">
+        <p14:section name="Découvrir" id="{e9832396-a912-b985-dfce-24604e418083}">
           <p14:sldIdLst>
             <p14:sldId id="257"/>
             <p14:sldId id="258"/>
           </p14:sldIdLst>
         </p14:section>
-        <p14:section name="Comprendre" id="{ad25e7ff-5f4b-8791-758f-ad71e5f9babc}">
+        <p14:section name="Comprendre" id="{7b96e585-d6d1-3d46-18c8-54e20fb00849}">
           <p14:sldIdLst>
             <p14:sldId id="259"/>
             <p14:sldId id="260"/>
@@ -158,7 +158,7 @@
             <p14:sldId id="268"/>
           </p14:sldIdLst>
         </p14:section>
-        <p14:section name="JIJ NU ! — Oefeningen" id="{2e4afaf4-863a-6c7d-773c-d42e920ea447}">
+        <p14:section name="JIJ NU ! — Oefeningen" id="{59ec9c6f-35fa-bced-07bb-7297901f1d3e}">
           <p14:sldIdLst>
             <p14:sldId id="269"/>
             <p14:sldId id="270"/>
@@ -175,7 +175,7 @@
             <p14:sldId id="281"/>
           </p14:sldIdLst>
         </p14:section>
-        <p14:section name="Clôture" id="{ba128805-27c7-5052-aebe-a1a1c16305ad}">
+        <p14:section name="Clôture" id="{d13a1eb5-41f6-6c20-b9d5-bad6e5c0526f}">
           <p14:sldIdLst>
             <p14:sldId id="282"/>
           </p14:sldIdLst>

--- a/neerlandais1/powerpoints/Module_24_Nou_toch_maar.pptx
+++ b/neerlandais1/powerpoints/Module_24_Nou_toch_maar.pptx
@@ -133,18 +133,18 @@
   <p:extLst>
     <p:ext uri="{521415D9-36F7-43E2-AB2F-B90AF26B5E84}">
       <p14:sectionLst xmlns:p14="http://schemas.microsoft.com/office/powerpoint/2010/main">
-        <p14:section name="Ouverture" id="{5e167113-339a-e583-4cd1-63123f7e36d7}">
+        <p14:section name="Ouverture" id="{debc6ffe-6ce9-60bd-3ff8-e9b4a80d9c00}">
           <p14:sldIdLst>
             <p14:sldId id="256"/>
           </p14:sldIdLst>
         </p14:section>
-        <p14:section name="Découvrir" id="{e9832396-a912-b985-dfce-24604e418083}">
+        <p14:section name="Découvrir" id="{b1a434b1-4c06-d0f5-caba-2688514ffbb4}">
           <p14:sldIdLst>
             <p14:sldId id="257"/>
             <p14:sldId id="258"/>
           </p14:sldIdLst>
         </p14:section>
-        <p14:section name="Comprendre" id="{7b96e585-d6d1-3d46-18c8-54e20fb00849}">
+        <p14:section name="Comprendre" id="{3d5d7930-68ab-326e-6caa-b70a0d870ecd}">
           <p14:sldIdLst>
             <p14:sldId id="259"/>
             <p14:sldId id="260"/>
@@ -158,7 +158,7 @@
             <p14:sldId id="268"/>
           </p14:sldIdLst>
         </p14:section>
-        <p14:section name="JIJ NU ! — Oefeningen" id="{59ec9c6f-35fa-bced-07bb-7297901f1d3e}">
+        <p14:section name="JIJ NU ! — Oefeningen" id="{a3266d8c-47cd-60c6-f8ef-e6e7092648f1}">
           <p14:sldIdLst>
             <p14:sldId id="269"/>
             <p14:sldId id="270"/>
@@ -175,7 +175,7 @@
             <p14:sldId id="281"/>
           </p14:sldIdLst>
         </p14:section>
-        <p14:section name="Clôture" id="{d13a1eb5-41f6-6c20-b9d5-bad6e5c0526f}">
+        <p14:section name="Clôture" id="{614dbc66-dd78-f59c-96af-50666523b404}">
           <p14:sldIdLst>
             <p14:sldId id="282"/>
           </p14:sldIdLst>

--- a/neerlandais1/powerpoints/Module_24_Nou_toch_maar.pptx
+++ b/neerlandais1/powerpoints/Module_24_Nou_toch_maar.pptx
@@ -133,18 +133,18 @@
   <p:extLst>
     <p:ext uri="{521415D9-36F7-43E2-AB2F-B90AF26B5E84}">
       <p14:sectionLst xmlns:p14="http://schemas.microsoft.com/office/powerpoint/2010/main">
-        <p14:section name="Ouverture" id="{debc6ffe-6ce9-60bd-3ff8-e9b4a80d9c00}">
+        <p14:section name="Ouverture" id="{102c8c51-1373-742f-a6fb-887390c5c0f3}">
           <p14:sldIdLst>
             <p14:sldId id="256"/>
           </p14:sldIdLst>
         </p14:section>
-        <p14:section name="Découvrir" id="{b1a434b1-4c06-d0f5-caba-2688514ffbb4}">
+        <p14:section name="Découvrir" id="{a8aee95d-49a2-3de0-1bbd-9e86c2819978}">
           <p14:sldIdLst>
             <p14:sldId id="257"/>
             <p14:sldId id="258"/>
           </p14:sldIdLst>
         </p14:section>
-        <p14:section name="Comprendre" id="{3d5d7930-68ab-326e-6caa-b70a0d870ecd}">
+        <p14:section name="Comprendre" id="{9ea84520-03de-8df6-a809-6c568e1a18c9}">
           <p14:sldIdLst>
             <p14:sldId id="259"/>
             <p14:sldId id="260"/>
@@ -158,7 +158,7 @@
             <p14:sldId id="268"/>
           </p14:sldIdLst>
         </p14:section>
-        <p14:section name="JIJ NU ! — Oefeningen" id="{a3266d8c-47cd-60c6-f8ef-e6e7092648f1}">
+        <p14:section name="JIJ NU ! — Oefeningen" id="{06f367a7-2a68-3264-e482-016c456d0e8e}">
           <p14:sldIdLst>
             <p14:sldId id="269"/>
             <p14:sldId id="270"/>
@@ -175,7 +175,7 @@
             <p14:sldId id="281"/>
           </p14:sldIdLst>
         </p14:section>
-        <p14:section name="Clôture" id="{614dbc66-dd78-f59c-96af-50666523b404}">
+        <p14:section name="Clôture" id="{6e6ee7ae-8959-f9bc-f3ef-9933bbc053df}">
           <p14:sldIdLst>
             <p14:sldId id="282"/>
           </p14:sldIdLst>

--- a/neerlandais1/powerpoints/Module_24_Nou_toch_maar.pptx
+++ b/neerlandais1/powerpoints/Module_24_Nou_toch_maar.pptx
@@ -133,18 +133,18 @@
   <p:extLst>
     <p:ext uri="{521415D9-36F7-43E2-AB2F-B90AF26B5E84}">
       <p14:sectionLst xmlns:p14="http://schemas.microsoft.com/office/powerpoint/2010/main">
-        <p14:section name="Ouverture" id="{102c8c51-1373-742f-a6fb-887390c5c0f3}">
+        <p14:section name="Ouverture" id="{f8d9ceae-4ed6-7f55-d723-8ff8594c2fc9}">
           <p14:sldIdLst>
             <p14:sldId id="256"/>
           </p14:sldIdLst>
         </p14:section>
-        <p14:section name="Découvrir" id="{a8aee95d-49a2-3de0-1bbd-9e86c2819978}">
+        <p14:section name="Découvrir" id="{728f991b-2d6e-6482-1fbd-a3271e79f7af}">
           <p14:sldIdLst>
             <p14:sldId id="257"/>
             <p14:sldId id="258"/>
           </p14:sldIdLst>
         </p14:section>
-        <p14:section name="Comprendre" id="{9ea84520-03de-8df6-a809-6c568e1a18c9}">
+        <p14:section name="Comprendre" id="{e76a9e1c-3b00-9a8c-827e-647f41f7799d}">
           <p14:sldIdLst>
             <p14:sldId id="259"/>
             <p14:sldId id="260"/>
@@ -158,7 +158,7 @@
             <p14:sldId id="268"/>
           </p14:sldIdLst>
         </p14:section>
-        <p14:section name="JIJ NU ! — Oefeningen" id="{06f367a7-2a68-3264-e482-016c456d0e8e}">
+        <p14:section name="JIJ NU ! — Oefeningen" id="{35fdd469-0a93-4d16-24e0-65efe32a268e}">
           <p14:sldIdLst>
             <p14:sldId id="269"/>
             <p14:sldId id="270"/>
@@ -175,7 +175,7 @@
             <p14:sldId id="281"/>
           </p14:sldIdLst>
         </p14:section>
-        <p14:section name="Clôture" id="{6e6ee7ae-8959-f9bc-f3ef-9933bbc053df}">
+        <p14:section name="Clôture" id="{6bdf8678-8913-11fb-d750-430ae606f6b4}">
           <p14:sldIdLst>
             <p14:sldId id="282"/>
           </p14:sldIdLst>

--- a/neerlandais1/powerpoints/Module_24_Nou_toch_maar.pptx
+++ b/neerlandais1/powerpoints/Module_24_Nou_toch_maar.pptx
@@ -133,18 +133,18 @@
   <p:extLst>
     <p:ext uri="{521415D9-36F7-43E2-AB2F-B90AF26B5E84}">
       <p14:sectionLst xmlns:p14="http://schemas.microsoft.com/office/powerpoint/2010/main">
-        <p14:section name="Ouverture" id="{f8d9ceae-4ed6-7f55-d723-8ff8594c2fc9}">
+        <p14:section name="Ouverture" id="{c51c39f2-9d3b-91a6-9230-71c5239b7a71}">
           <p14:sldIdLst>
             <p14:sldId id="256"/>
           </p14:sldIdLst>
         </p14:section>
-        <p14:section name="Découvrir" id="{728f991b-2d6e-6482-1fbd-a3271e79f7af}">
+        <p14:section name="Découvrir" id="{6f0b4dce-fcdc-a2f8-1dd0-f82a41bf7ea5}">
           <p14:sldIdLst>
             <p14:sldId id="257"/>
             <p14:sldId id="258"/>
           </p14:sldIdLst>
         </p14:section>
-        <p14:section name="Comprendre" id="{e76a9e1c-3b00-9a8c-827e-647f41f7799d}">
+        <p14:section name="Comprendre" id="{f3fb900e-64ab-fe16-ba5b-46d7ba8b0d6a}">
           <p14:sldIdLst>
             <p14:sldId id="259"/>
             <p14:sldId id="260"/>
@@ -158,7 +158,7 @@
             <p14:sldId id="268"/>
           </p14:sldIdLst>
         </p14:section>
-        <p14:section name="JIJ NU ! — Oefeningen" id="{35fdd469-0a93-4d16-24e0-65efe32a268e}">
+        <p14:section name="JIJ NU ! — Oefeningen" id="{95ecc900-ec97-5037-5f1e-89484ea93053}">
           <p14:sldIdLst>
             <p14:sldId id="269"/>
             <p14:sldId id="270"/>
@@ -175,7 +175,7 @@
             <p14:sldId id="281"/>
           </p14:sldIdLst>
         </p14:section>
-        <p14:section name="Clôture" id="{6bdf8678-8913-11fb-d750-430ae606f6b4}">
+        <p14:section name="Clôture" id="{3bb31e99-d0e9-035b-a645-c9fca777b243}">
           <p14:sldIdLst>
             <p14:sldId id="282"/>
           </p14:sldIdLst>

--- a/neerlandais1/powerpoints/Module_24_Nou_toch_maar.pptx
+++ b/neerlandais1/powerpoints/Module_24_Nou_toch_maar.pptx
@@ -133,18 +133,18 @@
   <p:extLst>
     <p:ext uri="{521415D9-36F7-43E2-AB2F-B90AF26B5E84}">
       <p14:sectionLst xmlns:p14="http://schemas.microsoft.com/office/powerpoint/2010/main">
-        <p14:section name="Ouverture" id="{c51c39f2-9d3b-91a6-9230-71c5239b7a71}">
+        <p14:section name="Ouverture" id="{f09ffd58-dc69-6258-b059-584becb5a537}">
           <p14:sldIdLst>
             <p14:sldId id="256"/>
           </p14:sldIdLst>
         </p14:section>
-        <p14:section name="Découvrir" id="{6f0b4dce-fcdc-a2f8-1dd0-f82a41bf7ea5}">
+        <p14:section name="Découvrir" id="{3faa53c9-fb3d-84a9-ffe7-d6bfcd70a1a5}">
           <p14:sldIdLst>
             <p14:sldId id="257"/>
             <p14:sldId id="258"/>
           </p14:sldIdLst>
         </p14:section>
-        <p14:section name="Comprendre" id="{f3fb900e-64ab-fe16-ba5b-46d7ba8b0d6a}">
+        <p14:section name="Comprendre" id="{0b958d30-df1c-d0a9-6cc4-cb54bd2720cf}">
           <p14:sldIdLst>
             <p14:sldId id="259"/>
             <p14:sldId id="260"/>
@@ -158,7 +158,7 @@
             <p14:sldId id="268"/>
           </p14:sldIdLst>
         </p14:section>
-        <p14:section name="JIJ NU ! — Oefeningen" id="{95ecc900-ec97-5037-5f1e-89484ea93053}">
+        <p14:section name="JIJ NU ! — Oefeningen" id="{3d200206-6b47-f311-646a-5291d53eaac6}">
           <p14:sldIdLst>
             <p14:sldId id="269"/>
             <p14:sldId id="270"/>
@@ -175,7 +175,7 @@
             <p14:sldId id="281"/>
           </p14:sldIdLst>
         </p14:section>
-        <p14:section name="Clôture" id="{3bb31e99-d0e9-035b-a645-c9fca777b243}">
+        <p14:section name="Clôture" id="{d14f7f2c-d7f9-d587-c7ec-db1b466ee572}">
           <p14:sldIdLst>
             <p14:sldId id="282"/>
           </p14:sldIdLst>

--- a/neerlandais1/powerpoints/Module_24_Nou_toch_maar.pptx
+++ b/neerlandais1/powerpoints/Module_24_Nou_toch_maar.pptx
@@ -133,18 +133,18 @@
   <p:extLst>
     <p:ext uri="{521415D9-36F7-43E2-AB2F-B90AF26B5E84}">
       <p14:sectionLst xmlns:p14="http://schemas.microsoft.com/office/powerpoint/2010/main">
-        <p14:section name="Ouverture" id="{f09ffd58-dc69-6258-b059-584becb5a537}">
+        <p14:section name="Ouverture" id="{56eead2f-2382-609e-0da9-44dbaf051b0a}">
           <p14:sldIdLst>
             <p14:sldId id="256"/>
           </p14:sldIdLst>
         </p14:section>
-        <p14:section name="Découvrir" id="{3faa53c9-fb3d-84a9-ffe7-d6bfcd70a1a5}">
+        <p14:section name="Découvrir" id="{79e5d232-83c6-11ce-e978-85c177f69965}">
           <p14:sldIdLst>
             <p14:sldId id="257"/>
             <p14:sldId id="258"/>
           </p14:sldIdLst>
         </p14:section>
-        <p14:section name="Comprendre" id="{0b958d30-df1c-d0a9-6cc4-cb54bd2720cf}">
+        <p14:section name="Comprendre" id="{92aaa128-2ea7-9bf7-2df9-5cf6a2c3725b}">
           <p14:sldIdLst>
             <p14:sldId id="259"/>
             <p14:sldId id="260"/>
@@ -158,7 +158,7 @@
             <p14:sldId id="268"/>
           </p14:sldIdLst>
         </p14:section>
-        <p14:section name="JIJ NU ! — Oefeningen" id="{3d200206-6b47-f311-646a-5291d53eaac6}">
+        <p14:section name="JIJ NU ! — Oefeningen" id="{c03c6d60-5c25-0167-c1b3-eab822b805e1}">
           <p14:sldIdLst>
             <p14:sldId id="269"/>
             <p14:sldId id="270"/>
@@ -175,7 +175,7 @@
             <p14:sldId id="281"/>
           </p14:sldIdLst>
         </p14:section>
-        <p14:section name="Clôture" id="{d14f7f2c-d7f9-d587-c7ec-db1b466ee572}">
+        <p14:section name="Clôture" id="{09350dab-95a2-41ee-aa7e-1fdbf4295d3e}">
           <p14:sldIdLst>
             <p14:sldId id="282"/>
           </p14:sldIdLst>

--- a/neerlandais1/powerpoints/Module_24_Nou_toch_maar.pptx
+++ b/neerlandais1/powerpoints/Module_24_Nou_toch_maar.pptx
@@ -133,18 +133,18 @@
   <p:extLst>
     <p:ext uri="{521415D9-36F7-43E2-AB2F-B90AF26B5E84}">
       <p14:sectionLst xmlns:p14="http://schemas.microsoft.com/office/powerpoint/2010/main">
-        <p14:section name="Ouverture" id="{56eead2f-2382-609e-0da9-44dbaf051b0a}">
+        <p14:section name="Ouverture" id="{2652a85e-08c1-7d8a-cbf0-0c9e95ee4492}">
           <p14:sldIdLst>
             <p14:sldId id="256"/>
           </p14:sldIdLst>
         </p14:section>
-        <p14:section name="Découvrir" id="{79e5d232-83c6-11ce-e978-85c177f69965}">
+        <p14:section name="Découvrir" id="{11f71421-4b57-7d1e-e7fe-5da271186376}">
           <p14:sldIdLst>
             <p14:sldId id="257"/>
             <p14:sldId id="258"/>
           </p14:sldIdLst>
         </p14:section>
-        <p14:section name="Comprendre" id="{92aaa128-2ea7-9bf7-2df9-5cf6a2c3725b}">
+        <p14:section name="Comprendre" id="{6b939aae-aafa-2689-2b59-d48bc410b3d5}">
           <p14:sldIdLst>
             <p14:sldId id="259"/>
             <p14:sldId id="260"/>
@@ -158,7 +158,7 @@
             <p14:sldId id="268"/>
           </p14:sldIdLst>
         </p14:section>
-        <p14:section name="JIJ NU ! — Oefeningen" id="{c03c6d60-5c25-0167-c1b3-eab822b805e1}">
+        <p14:section name="JIJ NU ! — Oefeningen" id="{74657b5f-5b68-52d4-dbfd-f49147241876}">
           <p14:sldIdLst>
             <p14:sldId id="269"/>
             <p14:sldId id="270"/>
@@ -175,7 +175,7 @@
             <p14:sldId id="281"/>
           </p14:sldIdLst>
         </p14:section>
-        <p14:section name="Clôture" id="{09350dab-95a2-41ee-aa7e-1fdbf4295d3e}">
+        <p14:section name="Clôture" id="{a88b0161-98b1-c0f9-a3b0-5f02bb90bf7c}">
           <p14:sldIdLst>
             <p14:sldId id="282"/>
           </p14:sldIdLst>
